--- a/stage3_neural_networks/03_convolutional_networks/Lecture-12-Convolutional-Networks.pptx
+++ b/stage3_neural_networks/03_convolutional_networks/Lecture-12-Convolutional-Networks.pptx
@@ -8308,6 +8308,9 @@
           <a:lstStyle/>
           <a:p>
             <a:r>
+              <a:rPr>
+                <a:latin typeface="Calibri"/>
+              </a:rPr>
               <a:t>AI Basic Training</a:t>
             </a:r>
           </a:p>
@@ -8329,6 +8332,9 @@
           <a:lstStyle/>
           <a:p>
             <a:r>
+              <a:rPr>
+                <a:latin typeface="Calibri"/>
+              </a:rPr>
               <a:t>Lesson 3.3  |  Stage 3: Neural Networks</a:t>
             </a:r>
           </a:p>
@@ -8350,6 +8356,9 @@
           <a:lstStyle/>
           <a:p>
             <a:r>
+              <a:rPr b="1">
+                <a:latin typeface="Calibri"/>
+              </a:rPr>
               <a:t>Convolutional Networks</a:t>
             </a:r>
           </a:p>
@@ -8371,6 +8380,9 @@
           <a:lstStyle/>
           <a:p>
             <a:r>
+              <a:rPr>
+                <a:latin typeface="Calibri"/>
+              </a:rPr>
               <a:t>Networks That See  -  Spatial Pattern Recognition</a:t>
             </a:r>
           </a:p>
@@ -8410,11 +8422,17 @@
           <a:lstStyle/>
           <a:p>
             <a:r>
+              <a:rPr b="1">
+                <a:latin typeface="Calibri"/>
+              </a:rPr>
               <a:t>Security</a:t>
             </a:r>
           </a:p>
           <a:p>
             <a:r>
+              <a:rPr b="1">
+                <a:latin typeface="Calibri"/>
+              </a:rPr>
               <a:t>Applications</a:t>
             </a:r>
           </a:p>
@@ -8436,6 +8454,9 @@
           <a:lstStyle/>
           <a:p>
             <a:r>
+              <a:rPr b="1">
+                <a:latin typeface="Calibri"/>
+              </a:rPr>
               <a:t>04</a:t>
             </a:r>
           </a:p>
@@ -8475,6 +8496,9 @@
           <a:lstStyle/>
           <a:p>
             <a:r>
+              <a:rPr b="1">
+                <a:latin typeface="Calibri"/>
+              </a:rPr>
               <a:t>CNNs in Cybersecurity</a:t>
             </a:r>
           </a:p>
@@ -8538,11 +8562,17 @@
           <a:lstStyle/>
           <a:p>
             <a:r>
+              <a:rPr b="1">
+                <a:latin typeface="Calibri"/>
+              </a:rPr>
               <a:t>Workshop</a:t>
             </a:r>
           </a:p>
           <a:p>
             <a:r>
+              <a:rPr b="1">
+                <a:latin typeface="Calibri"/>
+              </a:rPr>
               <a:t>and Next Steps</a:t>
             </a:r>
           </a:p>
@@ -8564,6 +8594,9 @@
           <a:lstStyle/>
           <a:p>
             <a:r>
+              <a:rPr b="1">
+                <a:latin typeface="Calibri"/>
+              </a:rPr>
               <a:t>05</a:t>
             </a:r>
           </a:p>
@@ -8603,6 +8636,9 @@
           <a:lstStyle/>
           <a:p>
             <a:r>
+              <a:rPr b="1">
+                <a:latin typeface="Calibri"/>
+              </a:rPr>
               <a:t>Workshop: 4 Hands-On Exercises</a:t>
             </a:r>
           </a:p>
@@ -8624,37 +8660,49 @@
           <a:lstStyle/>
           <a:p>
             <a:r>
-              <a:rPr sz="1600"/>
+              <a:rPr sz="1600">
+                <a:latin typeface="Calibri"/>
+              </a:rPr>
               <a:t>Exercise 1:  Why Dense fails on images - flatten destroys spatial info</a:t>
             </a:r>
           </a:p>
           <a:p>
             <a:r>
-              <a:rPr sz="1600"/>
+              <a:rPr sz="1600">
+                <a:latin typeface="Calibri"/>
+              </a:rPr>
               <a:t>Exercise 2:  Conv2D and MaxPooling - filter sliding, shape arithmetic</a:t>
             </a:r>
           </a:p>
           <a:p>
             <a:r>
-              <a:rPr sz="1600"/>
+              <a:rPr sz="1600">
+                <a:latin typeface="Calibri"/>
+              </a:rPr>
               <a:t>Exercise 3:  Build and train a CNN on MNIST - compare to Dense baseline</a:t>
             </a:r>
           </a:p>
           <a:p>
             <a:r>
-              <a:rPr sz="1600"/>
+              <a:rPr sz="1600">
+                <a:latin typeface="Calibri"/>
+              </a:rPr>
               <a:t>Exercise 4:  Malware visualisation - binary to image, CNN relevance</a:t>
             </a:r>
           </a:p>
           <a:p>
             <a:r>
-              <a:rPr sz="1600"/>
+              <a:rPr sz="1600">
+                <a:latin typeface="Calibri"/>
+              </a:rPr>
               <a:t/>
             </a:r>
           </a:p>
           <a:p>
             <a:r>
-              <a:rPr sz="1600"/>
+              <a:rPr sz="1600">
+                <a:latin typeface="Calibri"/>
+              </a:rPr>
               <a:t>MNIST downloads automatically (~11MB), CNN trains in 1-3 minutes</a:t>
             </a:r>
           </a:p>
@@ -8694,37 +8742,49 @@
           <a:lstStyle/>
           <a:p>
             <a:r>
-              <a:rPr sz="1500"/>
+              <a:rPr sz="1500">
+                <a:latin typeface="Calibri"/>
+              </a:rPr>
               <a:t>Dense layers ignore spatial relationships - CNNs preserve them</a:t>
             </a:r>
           </a:p>
           <a:p>
             <a:r>
-              <a:rPr sz="1500"/>
+              <a:rPr sz="1500">
+                <a:latin typeface="Calibri"/>
+              </a:rPr>
               <a:t>Convolution: small filter slides across image detecting local patterns</a:t>
             </a:r>
           </a:p>
           <a:p>
             <a:r>
-              <a:rPr sz="1500"/>
+              <a:rPr sz="1500">
+                <a:latin typeface="Calibri"/>
+              </a:rPr>
               <a:t>Translation invariance: same pattern detected anywhere in the image</a:t>
             </a:r>
           </a:p>
           <a:p>
             <a:r>
-              <a:rPr sz="1500"/>
+              <a:rPr sz="1500">
+                <a:latin typeface="Calibri"/>
+              </a:rPr>
               <a:t>Architecture: Conv2D -&gt; MaxPool -&gt; Conv2D -&gt; MaxPool -&gt; Flatten -&gt; Dense</a:t>
             </a:r>
           </a:p>
           <a:p>
             <a:r>
-              <a:rPr sz="1500"/>
+              <a:rPr sz="1500">
+                <a:latin typeface="Calibri"/>
+              </a:rPr>
               <a:t>Security use cases: malware images, traffic fingerprinting, log patterns</a:t>
             </a:r>
           </a:p>
           <a:p>
             <a:r>
-              <a:rPr sz="1500"/>
+              <a:rPr sz="1500">
+                <a:latin typeface="Calibri"/>
+              </a:rPr>
               <a:t>Next: Hyperparameter Tuning - systematically optimise your network</a:t>
             </a:r>
           </a:p>
@@ -8746,11 +8806,17 @@
           <a:lstStyle/>
           <a:p>
             <a:r>
+              <a:rPr b="1">
+                <a:latin typeface="Calibri"/>
+              </a:rPr>
               <a:t>Key</a:t>
             </a:r>
           </a:p>
           <a:p>
             <a:r>
+              <a:rPr b="1">
+                <a:latin typeface="Calibri"/>
+              </a:rPr>
               <a:t>Takeaways</a:t>
             </a:r>
           </a:p>
@@ -8790,6 +8856,9 @@
           <a:lstStyle/>
           <a:p>
             <a:r>
+              <a:rPr>
+                <a:latin typeface="Calibri"/>
+              </a:rPr>
               <a:t>Next:  Lesson 3.4 - Hyperparameter Tuning</a:t>
             </a:r>
           </a:p>
@@ -8811,6 +8880,9 @@
           <a:lstStyle/>
           <a:p>
             <a:r>
+              <a:rPr b="1">
+                <a:latin typeface="Calibri"/>
+              </a:rPr>
               <a:t>Convolutional Networks</a:t>
             </a:r>
           </a:p>
@@ -8850,31 +8922,41 @@
           <a:lstStyle/>
           <a:p>
             <a:r>
-              <a:rPr sz="1600"/>
+              <a:rPr sz="1600">
+                <a:latin typeface="Calibri"/>
+              </a:rPr>
               <a:t>Why Dense layers fail on images</a:t>
             </a:r>
           </a:p>
           <a:p>
             <a:r>
-              <a:rPr sz="1600"/>
+              <a:rPr sz="1600">
+                <a:latin typeface="Calibri"/>
+              </a:rPr>
               <a:t>How convolution works - filters and feature maps</a:t>
             </a:r>
           </a:p>
           <a:p>
             <a:r>
-              <a:rPr sz="1600"/>
+              <a:rPr sz="1600">
+                <a:latin typeface="Calibri"/>
+              </a:rPr>
               <a:t>CNN architecture - Conv2D, MaxPooling, Flatten</a:t>
             </a:r>
           </a:p>
           <a:p>
             <a:r>
-              <a:rPr sz="1600"/>
+              <a:rPr sz="1600">
+                <a:latin typeface="Calibri"/>
+              </a:rPr>
               <a:t>Security applications of CNNs</a:t>
             </a:r>
           </a:p>
           <a:p>
             <a:r>
-              <a:rPr sz="1600"/>
+              <a:rPr sz="1600">
+                <a:latin typeface="Calibri"/>
+              </a:rPr>
               <a:t>Building and training a CNN on MNIST</a:t>
             </a:r>
           </a:p>
@@ -8896,6 +8978,9 @@
           <a:lstStyle/>
           <a:p>
             <a:r>
+              <a:rPr b="1">
+                <a:latin typeface="Calibri"/>
+              </a:rPr>
               <a:t>What We'll Cover</a:t>
             </a:r>
           </a:p>
@@ -8935,11 +9020,17 @@
           <a:lstStyle/>
           <a:p>
             <a:r>
+              <a:rPr b="1">
+                <a:latin typeface="Calibri"/>
+              </a:rPr>
               <a:t>Why Dense</a:t>
             </a:r>
           </a:p>
           <a:p>
             <a:r>
+              <a:rPr b="1">
+                <a:latin typeface="Calibri"/>
+              </a:rPr>
               <a:t>Layers Fail</a:t>
             </a:r>
           </a:p>
@@ -8961,6 +9052,9 @@
           <a:lstStyle/>
           <a:p>
             <a:r>
+              <a:rPr b="1">
+                <a:latin typeface="Calibri"/>
+              </a:rPr>
               <a:t>01</a:t>
             </a:r>
           </a:p>
@@ -9000,6 +9094,9 @@
           <a:lstStyle/>
           <a:p>
             <a:r>
+              <a:rPr>
+                <a:latin typeface="Calibri"/>
+              </a:rPr>
               <a:t/>
             </a:r>
           </a:p>
@@ -9021,25 +9118,33 @@
           <a:lstStyle/>
           <a:p>
             <a:r>
-              <a:rPr sz="1400"/>
+              <a:rPr sz="1400">
+                <a:latin typeface="Calibri"/>
+              </a:rPr>
               <a:t>A CNN knows that pixel (10,10)</a:t>
             </a:r>
           </a:p>
           <a:p>
             <a:r>
-              <a:rPr sz="1400"/>
+              <a:rPr sz="1400">
+                <a:latin typeface="Calibri"/>
+              </a:rPr>
               <a:t>is adjacent to pixel (10,11).</a:t>
             </a:r>
           </a:p>
           <a:p>
             <a:r>
-              <a:rPr sz="1400"/>
+              <a:rPr sz="1400">
+                <a:latin typeface="Calibri"/>
+              </a:rPr>
               <a:t/>
             </a:r>
           </a:p>
           <a:p>
             <a:r>
-              <a:rPr sz="1400"/>
+              <a:rPr sz="1400">
+                <a:latin typeface="Calibri"/>
+              </a:rPr>
               <a:t>A Dense layer does not.</a:t>
             </a:r>
           </a:p>
@@ -9061,6 +9166,9 @@
           <a:lstStyle/>
           <a:p>
             <a:r>
+              <a:rPr b="1">
+                <a:latin typeface="Calibri"/>
+              </a:rPr>
               <a:t>The Problem with Dense Layers on Images</a:t>
             </a:r>
           </a:p>
@@ -9082,55 +9190,73 @@
           <a:lstStyle/>
           <a:p>
             <a:r>
-              <a:rPr sz="1400"/>
+              <a:rPr sz="1400">
+                <a:latin typeface="Calibri"/>
+              </a:rPr>
               <a:t>Dense layers treat all inputs equally</a:t>
             </a:r>
           </a:p>
           <a:p>
             <a:r>
-              <a:rPr sz="1400"/>
+              <a:rPr sz="1400">
+                <a:latin typeface="Calibri"/>
+              </a:rPr>
               <a:t>  Pixel (0,0) and pixel (7,7) are the same</a:t>
             </a:r>
           </a:p>
           <a:p>
             <a:r>
-              <a:rPr sz="1400"/>
+              <a:rPr sz="1400">
+                <a:latin typeface="Calibri"/>
+              </a:rPr>
               <a:t>  No concept of 'next to' or 'nearby'</a:t>
             </a:r>
           </a:p>
           <a:p>
             <a:r>
-              <a:rPr sz="1400"/>
+              <a:rPr sz="1400">
+                <a:latin typeface="Calibri"/>
+              </a:rPr>
               <a:t/>
             </a:r>
           </a:p>
           <a:p>
             <a:r>
-              <a:rPr sz="1400"/>
+              <a:rPr sz="1400">
+                <a:latin typeface="Calibri"/>
+              </a:rPr>
               <a:t>Dense flattens the image:</a:t>
             </a:r>
           </a:p>
           <a:p>
             <a:r>
-              <a:rPr sz="1400"/>
+              <a:rPr sz="1400">
+                <a:latin typeface="Calibri"/>
+              </a:rPr>
               <a:t>  8x8 image = 64 independent numbers</a:t>
             </a:r>
           </a:p>
           <a:p>
             <a:r>
-              <a:rPr sz="1400"/>
+              <a:rPr sz="1400">
+                <a:latin typeface="Calibri"/>
+              </a:rPr>
               <a:t>  Spatial relationships are destroyed</a:t>
             </a:r>
           </a:p>
           <a:p>
             <a:r>
-              <a:rPr sz="1400"/>
+              <a:rPr sz="1400">
+                <a:latin typeface="Calibri"/>
+              </a:rPr>
               <a:t/>
             </a:r>
           </a:p>
           <a:p>
             <a:r>
-              <a:rPr sz="1400"/>
+              <a:rPr sz="1400">
+                <a:latin typeface="Calibri"/>
+              </a:rPr>
               <a:t>CNNs preserve spatial structure</a:t>
             </a:r>
           </a:p>
@@ -9170,11 +9296,17 @@
           <a:lstStyle/>
           <a:p>
             <a:r>
+              <a:rPr b="1">
+                <a:latin typeface="Calibri"/>
+              </a:rPr>
               <a:t>How Convolution</a:t>
             </a:r>
           </a:p>
           <a:p>
             <a:r>
+              <a:rPr b="1">
+                <a:latin typeface="Calibri"/>
+              </a:rPr>
               <a:t>Works</a:t>
             </a:r>
           </a:p>
@@ -9196,6 +9328,9 @@
           <a:lstStyle/>
           <a:p>
             <a:r>
+              <a:rPr b="1">
+                <a:latin typeface="Calibri"/>
+              </a:rPr>
               <a:t>02</a:t>
             </a:r>
           </a:p>
@@ -9235,6 +9370,9 @@
           <a:lstStyle/>
           <a:p>
             <a:r>
+              <a:rPr b="1">
+                <a:latin typeface="Calibri"/>
+              </a:rPr>
               <a:t>A Small Filter Slides Across the Entire Image</a:t>
             </a:r>
           </a:p>
@@ -9298,11 +9436,17 @@
           <a:lstStyle/>
           <a:p>
             <a:r>
+              <a:rPr b="1">
+                <a:latin typeface="Calibri"/>
+              </a:rPr>
               <a:t>CNN</a:t>
             </a:r>
           </a:p>
           <a:p>
             <a:r>
+              <a:rPr b="1">
+                <a:latin typeface="Calibri"/>
+              </a:rPr>
               <a:t>Architecture</a:t>
             </a:r>
           </a:p>
@@ -9324,6 +9468,9 @@
           <a:lstStyle/>
           <a:p>
             <a:r>
+              <a:rPr b="1">
+                <a:latin typeface="Calibri"/>
+              </a:rPr>
               <a:t>03</a:t>
             </a:r>
           </a:p>
@@ -9363,6 +9510,9 @@
           <a:lstStyle/>
           <a:p>
             <a:r>
+              <a:rPr b="1">
+                <a:latin typeface="Calibri"/>
+              </a:rPr>
               <a:t>The Full CNN Pipeline</a:t>
             </a:r>
           </a:p>
@@ -9426,6 +9576,9 @@
           <a:lstStyle/>
           <a:p>
             <a:r>
+              <a:rPr b="1">
+                <a:latin typeface="Calibri"/>
+              </a:rPr>
               <a:t>Key Components</a:t>
             </a:r>
           </a:p>
@@ -9447,55 +9600,73 @@
           <a:lstStyle/>
           <a:p>
             <a:r>
-              <a:rPr sz="1400"/>
+              <a:rPr sz="1400">
+                <a:latin typeface="Calibri"/>
+              </a:rPr>
               <a:t>Conv2D(32, (3,3))</a:t>
             </a:r>
           </a:p>
           <a:p>
             <a:r>
-              <a:rPr sz="1400"/>
+              <a:rPr sz="1400">
+                <a:latin typeface="Calibri"/>
+              </a:rPr>
               <a:t>  32 filters, each 3x3</a:t>
             </a:r>
           </a:p>
           <a:p>
             <a:r>
-              <a:rPr sz="1400"/>
+              <a:rPr sz="1400">
+                <a:latin typeface="Calibri"/>
+              </a:rPr>
               <a:t>  Detects local patterns</a:t>
             </a:r>
           </a:p>
           <a:p>
             <a:r>
-              <a:rPr sz="1400"/>
+              <a:rPr sz="1400">
+                <a:latin typeface="Calibri"/>
+              </a:rPr>
               <a:t>  Output: feature maps</a:t>
             </a:r>
           </a:p>
           <a:p>
             <a:r>
-              <a:rPr sz="1400"/>
+              <a:rPr sz="1400">
+                <a:latin typeface="Calibri"/>
+              </a:rPr>
               <a:t/>
             </a:r>
           </a:p>
           <a:p>
             <a:r>
-              <a:rPr sz="1400"/>
+              <a:rPr sz="1400">
+                <a:latin typeface="Calibri"/>
+              </a:rPr>
               <a:t>MaxPooling2D((2,2))</a:t>
             </a:r>
           </a:p>
           <a:p>
             <a:r>
-              <a:rPr sz="1400"/>
+              <a:rPr sz="1400">
+                <a:latin typeface="Calibri"/>
+              </a:rPr>
               <a:t>  Keeps strongest activation</a:t>
             </a:r>
           </a:p>
           <a:p>
             <a:r>
-              <a:rPr sz="1400"/>
+              <a:rPr sz="1400">
+                <a:latin typeface="Calibri"/>
+              </a:rPr>
               <a:t>  Reduces spatial dimensions</a:t>
             </a:r>
           </a:p>
           <a:p>
             <a:r>
-              <a:rPr sz="1400"/>
+              <a:rPr sz="1400">
+                <a:latin typeface="Calibri"/>
+              </a:rPr>
               <a:t>  Makes features position-tolerant</a:t>
             </a:r>
           </a:p>
@@ -9517,55 +9688,73 @@
           <a:lstStyle/>
           <a:p>
             <a:r>
-              <a:rPr sz="1400"/>
+              <a:rPr sz="1400">
+                <a:latin typeface="Calibri"/>
+              </a:rPr>
               <a:t>Flatten()</a:t>
             </a:r>
           </a:p>
           <a:p>
             <a:r>
-              <a:rPr sz="1400"/>
+              <a:rPr sz="1400">
+                <a:latin typeface="Calibri"/>
+              </a:rPr>
               <a:t>  Converts 2D maps to 1D vector</a:t>
             </a:r>
           </a:p>
           <a:p>
             <a:r>
-              <a:rPr sz="1400"/>
+              <a:rPr sz="1400">
+                <a:latin typeface="Calibri"/>
+              </a:rPr>
               <a:t>  Bridge to Dense layers</a:t>
             </a:r>
           </a:p>
           <a:p>
             <a:r>
-              <a:rPr sz="1400"/>
+              <a:rPr sz="1400">
+                <a:latin typeface="Calibri"/>
+              </a:rPr>
               <a:t/>
             </a:r>
           </a:p>
           <a:p>
             <a:r>
-              <a:rPr sz="1400"/>
+              <a:rPr sz="1400">
+                <a:latin typeface="Calibri"/>
+              </a:rPr>
               <a:t>Dense(128, activation='relu')</a:t>
             </a:r>
           </a:p>
           <a:p>
             <a:r>
-              <a:rPr sz="1400"/>
+              <a:rPr sz="1400">
+                <a:latin typeface="Calibri"/>
+              </a:rPr>
               <a:t>  Combines spatial features</a:t>
             </a:r>
           </a:p>
           <a:p>
             <a:r>
-              <a:rPr sz="1400"/>
+              <a:rPr sz="1400">
+                <a:latin typeface="Calibri"/>
+              </a:rPr>
               <a:t/>
             </a:r>
           </a:p>
           <a:p>
             <a:r>
-              <a:rPr sz="1400"/>
+              <a:rPr sz="1400">
+                <a:latin typeface="Calibri"/>
+              </a:rPr>
               <a:t>Dense(10, activation='softmax')</a:t>
             </a:r>
           </a:p>
           <a:p>
             <a:r>
-              <a:rPr sz="1400"/>
+              <a:rPr sz="1400">
+                <a:latin typeface="Calibri"/>
+              </a:rPr>
               <a:t>  Class probabilities (sum=1)</a:t>
             </a:r>
           </a:p>
